--- a/app/templates/universidad_azul/plantilla_programa_de_especializacion.pptx
+++ b/app/templates/universidad_azul/plantilla_programa_de_especializacion.pptx
@@ -119,6 +119,82 @@
 </p:presentation>
 </file>
 
+<file path=ppt/revisionInfo.xml><?xml version="1.0" encoding="utf-8"?>
+<p1510:revInfo xmlns:a="http://schemas.openxmlformats.org/drawingml/2006/main" xmlns:r="http://schemas.openxmlformats.org/officeDocument/2006/relationships" xmlns:p1510="http://schemas.microsoft.com/office/powerpoint/2015/10/main">
+  <p1510:revLst>
+    <p1510:client id="{79DD9C94-355C-4CB0-BA32-5215F3FB7B8B}" v="3" dt="2026-02-27T23:42:41.313"/>
+  </p1510:revLst>
+</p1510:revInfo>
+</file>
+
+<file path=ppt/changesInfos/changesInfo1.xml><?xml version="1.0" encoding="utf-8"?>
+<pc:chgInfo xmlns:a="http://schemas.openxmlformats.org/drawingml/2006/main" xmlns:r="http://schemas.openxmlformats.org/officeDocument/2006/relationships" xmlns:ac="http://schemas.microsoft.com/office/drawing/2013/main/command" xmlns:pc="http://schemas.microsoft.com/office/powerpoint/2013/main/command">
+  <pc:docChgLst>
+    <pc:chgData name="Benjamín de Jesús Cueva Niño de Guzmán" userId="56da303013910523" providerId="LiveId" clId="{532B7A48-8887-4F62-9537-0BA1FAE83637}"/>
+    <pc:docChg chg="undo custSel modSld">
+      <pc:chgData name="Benjamín de Jesús Cueva Niño de Guzmán" userId="56da303013910523" providerId="LiveId" clId="{532B7A48-8887-4F62-9537-0BA1FAE83637}" dt="2026-03-05T18:29:41.874" v="126" actId="1035"/>
+      <pc:docMkLst>
+        <pc:docMk/>
+      </pc:docMkLst>
+      <pc:sldChg chg="modSp mod">
+        <pc:chgData name="Benjamín de Jesús Cueva Niño de Guzmán" userId="56da303013910523" providerId="LiveId" clId="{532B7A48-8887-4F62-9537-0BA1FAE83637}" dt="2026-03-05T18:29:41.874" v="126" actId="1035"/>
+        <pc:sldMkLst>
+          <pc:docMk/>
+          <pc:sldMk cId="52070105" sldId="290"/>
+        </pc:sldMkLst>
+        <pc:spChg chg="mod">
+          <ac:chgData name="Benjamín de Jesús Cueva Niño de Guzmán" userId="56da303013910523" providerId="LiveId" clId="{532B7A48-8887-4F62-9537-0BA1FAE83637}" dt="2026-02-27T23:58:37.216" v="117" actId="1035"/>
+          <ac:spMkLst>
+            <pc:docMk/>
+            <pc:sldMk cId="52070105" sldId="290"/>
+            <ac:spMk id="2" creationId="{00000000-0000-0000-0000-000000000000}"/>
+          </ac:spMkLst>
+        </pc:spChg>
+        <pc:spChg chg="mod">
+          <ac:chgData name="Benjamín de Jesús Cueva Niño de Guzmán" userId="56da303013910523" providerId="LiveId" clId="{532B7A48-8887-4F62-9537-0BA1FAE83637}" dt="2026-03-04T23:09:55.249" v="121" actId="1036"/>
+          <ac:spMkLst>
+            <pc:docMk/>
+            <pc:sldMk cId="52070105" sldId="290"/>
+            <ac:spMk id="3" creationId="{00000000-0000-0000-0000-000000000000}"/>
+          </ac:spMkLst>
+        </pc:spChg>
+        <pc:spChg chg="mod">
+          <ac:chgData name="Benjamín de Jesús Cueva Niño de Guzmán" userId="56da303013910523" providerId="LiveId" clId="{532B7A48-8887-4F62-9537-0BA1FAE83637}" dt="2026-03-05T18:29:41.874" v="126" actId="1035"/>
+          <ac:spMkLst>
+            <pc:docMk/>
+            <pc:sldMk cId="52070105" sldId="290"/>
+            <ac:spMk id="19" creationId="{00000000-0000-0000-0000-000000000000}"/>
+          </ac:spMkLst>
+        </pc:spChg>
+      </pc:sldChg>
+      <pc:sldChg chg="modSp mod">
+        <pc:chgData name="Benjamín de Jesús Cueva Niño de Guzmán" userId="56da303013910523" providerId="LiveId" clId="{532B7A48-8887-4F62-9537-0BA1FAE83637}" dt="2026-02-27T23:40:52.276" v="107" actId="962"/>
+        <pc:sldMkLst>
+          <pc:docMk/>
+          <pc:sldMk cId="3083265798" sldId="291"/>
+        </pc:sldMkLst>
+        <pc:spChg chg="mod">
+          <ac:chgData name="Benjamín de Jesús Cueva Niño de Guzmán" userId="56da303013910523" providerId="LiveId" clId="{532B7A48-8887-4F62-9537-0BA1FAE83637}" dt="2026-02-27T23:40:52.276" v="107" actId="962"/>
+          <ac:spMkLst>
+            <pc:docMk/>
+            <pc:sldMk cId="3083265798" sldId="291"/>
+            <ac:spMk id="18" creationId="{00000000-0000-0000-0000-000000000000}"/>
+          </ac:spMkLst>
+        </pc:spChg>
+        <pc:graphicFrameChg chg="mod modGraphic">
+          <ac:chgData name="Benjamín de Jesús Cueva Niño de Guzmán" userId="56da303013910523" providerId="LiveId" clId="{532B7A48-8887-4F62-9537-0BA1FAE83637}" dt="2026-02-27T23:40:43.973" v="106" actId="962"/>
+          <ac:graphicFrameMkLst>
+            <pc:docMk/>
+            <pc:sldMk cId="3083265798" sldId="291"/>
+            <ac:graphicFrameMk id="24" creationId="{00000000-0000-0000-0000-000000000000}"/>
+          </ac:graphicFrameMkLst>
+        </pc:graphicFrameChg>
+      </pc:sldChg>
+    </pc:docChg>
+  </pc:docChgLst>
+</pc:chgInfo>
+</file>
+
 <file path=ppt/handoutMasters/handoutMaster1.xml><?xml version="1.0" encoding="utf-8"?>
 <p:handoutMaster xmlns:a="http://schemas.openxmlformats.org/drawingml/2006/main" xmlns:r="http://schemas.openxmlformats.org/officeDocument/2006/relationships" xmlns:p="http://schemas.openxmlformats.org/presentationml/2006/main">
   <p:cSld>
@@ -201,7 +277,7 @@
           <a:p>
             <a:fld id="{03C7FEFC-EB52-44D6-B3F1-2A7BB7FA4226}" type="datetimeFigureOut">
               <a:rPr lang="es-PE" smtClean="0"/>
-              <a:t>2/02/2026</a:t>
+              <a:t>7/06/2026</a:t>
             </a:fld>
             <a:endParaRPr lang="es-PE" dirty="0"/>
           </a:p>
@@ -366,7 +442,7 @@
           <a:p>
             <a:fld id="{64955E78-CBAA-441B-9163-D9CD5E983BDA}" type="datetimeFigureOut">
               <a:rPr lang="en-US" smtClean="0"/>
-              <a:t>2/2/2026</a:t>
+              <a:t>6/7/2026</a:t>
             </a:fld>
             <a:endParaRPr lang="en-US" dirty="0"/>
           </a:p>
@@ -765,7 +841,7 @@
           <a:p>
             <a:fld id="{5C4C4E00-4716-4B48-9D97-535E4F94A274}" type="datetimeFigureOut">
               <a:rPr lang="es-PE" smtClean="0"/>
-              <a:t>2/02/2026</a:t>
+              <a:t>7/06/2026</a:t>
             </a:fld>
             <a:endParaRPr lang="es-PE" dirty="0"/>
           </a:p>
@@ -935,7 +1011,7 @@
           <a:p>
             <a:fld id="{5C4C4E00-4716-4B48-9D97-535E4F94A274}" type="datetimeFigureOut">
               <a:rPr lang="es-PE" smtClean="0"/>
-              <a:t>2/02/2026</a:t>
+              <a:t>7/06/2026</a:t>
             </a:fld>
             <a:endParaRPr lang="es-PE" dirty="0"/>
           </a:p>
@@ -1115,7 +1191,7 @@
           <a:p>
             <a:fld id="{5C4C4E00-4716-4B48-9D97-535E4F94A274}" type="datetimeFigureOut">
               <a:rPr lang="es-PE" smtClean="0"/>
-              <a:t>2/02/2026</a:t>
+              <a:t>7/06/2026</a:t>
             </a:fld>
             <a:endParaRPr lang="es-PE" dirty="0"/>
           </a:p>
@@ -1285,7 +1361,7 @@
           <a:p>
             <a:fld id="{5C4C4E00-4716-4B48-9D97-535E4F94A274}" type="datetimeFigureOut">
               <a:rPr lang="es-PE" smtClean="0"/>
-              <a:t>2/02/2026</a:t>
+              <a:t>7/06/2026</a:t>
             </a:fld>
             <a:endParaRPr lang="es-PE" dirty="0"/>
           </a:p>
@@ -1529,7 +1605,7 @@
           <a:p>
             <a:fld id="{5C4C4E00-4716-4B48-9D97-535E4F94A274}" type="datetimeFigureOut">
               <a:rPr lang="es-PE" smtClean="0"/>
-              <a:t>2/02/2026</a:t>
+              <a:t>7/06/2026</a:t>
             </a:fld>
             <a:endParaRPr lang="es-PE" dirty="0"/>
           </a:p>
@@ -1761,7 +1837,7 @@
           <a:p>
             <a:fld id="{5C4C4E00-4716-4B48-9D97-535E4F94A274}" type="datetimeFigureOut">
               <a:rPr lang="es-PE" smtClean="0"/>
-              <a:t>2/02/2026</a:t>
+              <a:t>7/06/2026</a:t>
             </a:fld>
             <a:endParaRPr lang="es-PE" dirty="0"/>
           </a:p>
@@ -2128,7 +2204,7 @@
           <a:p>
             <a:fld id="{5C4C4E00-4716-4B48-9D97-535E4F94A274}" type="datetimeFigureOut">
               <a:rPr lang="es-PE" smtClean="0"/>
-              <a:t>2/02/2026</a:t>
+              <a:t>7/06/2026</a:t>
             </a:fld>
             <a:endParaRPr lang="es-PE" dirty="0"/>
           </a:p>
@@ -2246,7 +2322,7 @@
           <a:p>
             <a:fld id="{5C4C4E00-4716-4B48-9D97-535E4F94A274}" type="datetimeFigureOut">
               <a:rPr lang="es-PE" smtClean="0"/>
-              <a:t>2/02/2026</a:t>
+              <a:t>7/06/2026</a:t>
             </a:fld>
             <a:endParaRPr lang="es-PE" dirty="0"/>
           </a:p>
@@ -2341,7 +2417,7 @@
           <a:p>
             <a:fld id="{5C4C4E00-4716-4B48-9D97-535E4F94A274}" type="datetimeFigureOut">
               <a:rPr lang="es-PE" smtClean="0"/>
-              <a:t>2/02/2026</a:t>
+              <a:t>7/06/2026</a:t>
             </a:fld>
             <a:endParaRPr lang="es-PE" dirty="0"/>
           </a:p>
@@ -2618,7 +2694,7 @@
           <a:p>
             <a:fld id="{5C4C4E00-4716-4B48-9D97-535E4F94A274}" type="datetimeFigureOut">
               <a:rPr lang="es-PE" smtClean="0"/>
-              <a:t>2/02/2026</a:t>
+              <a:t>7/06/2026</a:t>
             </a:fld>
             <a:endParaRPr lang="es-PE" dirty="0"/>
           </a:p>
@@ -2875,7 +2951,7 @@
           <a:p>
             <a:fld id="{5C4C4E00-4716-4B48-9D97-535E4F94A274}" type="datetimeFigureOut">
               <a:rPr lang="es-PE" smtClean="0"/>
-              <a:t>2/02/2026</a:t>
+              <a:t>7/06/2026</a:t>
             </a:fld>
             <a:endParaRPr lang="es-PE" dirty="0"/>
           </a:p>
@@ -3088,7 +3164,7 @@
           <a:p>
             <a:fld id="{5C4C4E00-4716-4B48-9D97-535E4F94A274}" type="datetimeFigureOut">
               <a:rPr lang="es-PE" smtClean="0"/>
-              <a:t>2/02/2026</a:t>
+              <a:t>7/06/2026</a:t>
             </a:fld>
             <a:endParaRPr lang="es-PE" dirty="0"/>
           </a:p>
@@ -3578,7 +3654,7 @@
         </p:nvSpPr>
         <p:spPr>
           <a:xfrm>
-            <a:off x="474329" y="3082550"/>
+            <a:off x="474329" y="2466013"/>
             <a:ext cx="5909343" cy="954107"/>
           </a:xfrm>
           <a:prstGeom prst="rect">
@@ -4035,8 +4111,8 @@
         </p:nvSpPr>
         <p:spPr>
           <a:xfrm>
-            <a:off x="619580" y="1420390"/>
-            <a:ext cx="5618840" cy="1569660"/>
+            <a:off x="619580" y="1520598"/>
+            <a:ext cx="5618840" cy="830997"/>
           </a:xfrm>
           <a:prstGeom prst="rect">
             <a:avLst/>
@@ -4147,15 +4223,6 @@
               <a:rPr lang="es-PE" sz="4800" dirty="0">
                 <a:latin typeface="Old English Text MT" panose="03040902040508030806" pitchFamily="66" charset="0"/>
               </a:rPr>
-              <a:t>Programa de</a:t>
-            </a:r>
-          </a:p>
-          <a:p>
-            <a:pPr algn="ctr"/>
-            <a:r>
-              <a:rPr lang="es-PE" sz="4800" dirty="0">
-                <a:latin typeface="Old English Text MT" panose="03040902040508030806" pitchFamily="66" charset="0"/>
-              </a:rPr>
               <a:t>Especialización</a:t>
             </a:r>
           </a:p>
@@ -4169,7 +4236,7 @@
         </p:nvSpPr>
         <p:spPr>
           <a:xfrm>
-            <a:off x="2809279" y="2837298"/>
+            <a:off x="2809279" y="2261102"/>
             <a:ext cx="1239442" cy="306109"/>
           </a:xfrm>
           <a:prstGeom prst="rect">
@@ -4320,14 +4387,14 @@
       </p:sp>
       <p:sp>
         <p:nvSpPr>
-          <p:cNvPr id="19" name="Rectangle 60"/>
+          <p:cNvPr id="19" name="PH_CONTENIDO_PRINCIPAL"/>
           <p:cNvSpPr/>
           <p:nvPr/>
         </p:nvSpPr>
         <p:spPr>
           <a:xfrm>
-            <a:off x="477169" y="4290909"/>
-            <a:ext cx="5903662" cy="2967105"/>
+            <a:off x="419400" y="3365091"/>
+            <a:ext cx="6019200" cy="1738938"/>
           </a:xfrm>
           <a:prstGeom prst="rect">
             <a:avLst/>
@@ -4337,8 +4404,8 @@
           </a:ln>
         </p:spPr>
         <p:txBody>
-          <a:bodyPr vert="horz" lIns="0" tIns="0" rIns="0" bIns="0" rtlCol="0" anchor="ctr">
-            <a:noAutofit/>
+          <a:bodyPr vert="horz" lIns="0" tIns="0" rIns="0" bIns="0" rtlCol="0" anchor="t" anchorCtr="1">
+            <a:spAutoFit/>
           </a:bodyPr>
           <a:lstStyle>
             <a:defPPr>
@@ -4451,7 +4518,7 @@
                 <a:ea typeface="Times New Roman" panose="02020603050405020304" pitchFamily="18" charset="0"/>
                 <a:cs typeface="Times New Roman" panose="02020603050405020304" pitchFamily="18" charset="0"/>
               </a:rPr>
-              <a:t>Por haber culminado satisfactoriamente el </a:t>
+              <a:t>Por haber culminado satisfactoriamente </a:t>
             </a:r>
             <a:r>
               <a:rPr lang="es-PE" sz="1400" dirty="0">
@@ -4462,25 +4529,7 @@
                 <a:ea typeface="Times New Roman" panose="02020603050405020304" pitchFamily="18" charset="0"/>
                 <a:cs typeface="Times New Roman" panose="02020603050405020304" pitchFamily="18" charset="0"/>
               </a:rPr>
-              <a:t>PROGRAMA </a:t>
-            </a:r>
-          </a:p>
-          <a:p>
-            <a:pPr algn="ctr">
-              <a:spcBef>
-                <a:spcPts val="600"/>
-              </a:spcBef>
-            </a:pPr>
-            <a:r>
-              <a:rPr lang="es-PE" sz="1400" dirty="0">
-                <a:solidFill>
-                  <a:srgbClr val="000000"/>
-                </a:solidFill>
-                <a:latin typeface="Times New Roman" panose="02020603050405020304" pitchFamily="18" charset="0"/>
-                <a:ea typeface="Times New Roman" panose="02020603050405020304" pitchFamily="18" charset="0"/>
-                <a:cs typeface="Times New Roman" panose="02020603050405020304" pitchFamily="18" charset="0"/>
-              </a:rPr>
-              <a:t>DE </a:t>
+              <a:t>la </a:t>
             </a:r>
             <a:r>
               <a:rPr lang="es-PE" sz="1400" dirty="0">
@@ -4623,7 +4672,7 @@
                 <a:ea typeface="Cambria Math" panose="02040503050406030204" pitchFamily="18" charset="0"/>
                 <a:cs typeface="Times New Roman" panose="02020603050405020304" pitchFamily="18" charset="0"/>
               </a:rPr>
-              <a:t>Por tanto, se expide el presente Programa de Especialización para que se le reconozca como tal.</a:t>
+              <a:t>Por tanto, se expide la presente Especialización para que se le reconozca como tal.</a:t>
             </a:r>
           </a:p>
         </p:txBody>
@@ -5395,14 +5444,14 @@
           <p:nvPr>
             <p:extLst>
               <p:ext uri="{D42A27DB-BD31-4B8C-83A1-F6EECF244321}">
-                <p14:modId xmlns:p14="http://schemas.microsoft.com/office/powerpoint/2010/main" val="251964362"/>
+                <p14:modId xmlns:p14="http://schemas.microsoft.com/office/powerpoint/2010/main" val="4255727627"/>
               </p:ext>
             </p:extLst>
           </p:nvPr>
         </p:nvGraphicFramePr>
         <p:xfrm>
           <a:off x="619904" y="8314295"/>
-          <a:ext cx="2286000" cy="1107330"/>
+          <a:ext cx="2286000" cy="1229250"/>
         </p:xfrm>
         <a:graphic>
           <a:graphicData uri="http://schemas.openxmlformats.org/drawingml/2006/table">
@@ -5434,11 +5483,15 @@
                     <a:p>
                       <a:r>
                         <a:rPr lang="es-ES" sz="800" b="1" dirty="0"/>
-                        <a:t>CÓDIGO: UNT-CCSS/2022 -</a:t>
+                        <a:t>CÓDIGO: UNT-CCSS/</a:t>
                       </a:r>
                       <a:r>
-                        <a:rPr lang="es-ES" sz="800" b="1" baseline="0" dirty="0"/>
-                        <a:t> CC</a:t>
+                        <a:rPr lang="es-ES" sz="800" b="1"/>
+                        <a:t>2022 –</a:t>
+                      </a:r>
+                      <a:r>
+                        <a:rPr lang="es-ES" sz="800" b="1" baseline="0"/>
+                        <a:t> {{INICIALES}}</a:t>
                       </a:r>
                       <a:endParaRPr lang="es-ES" sz="800" b="1" dirty="0"/>
                     </a:p>
@@ -5845,7 +5898,7 @@
       </p:pic>
       <p:sp>
         <p:nvSpPr>
-          <p:cNvPr id="18" name="CuadroTexto 17"/>
+          <p:cNvPr id="18" name="PH_TEMA"/>
           <p:cNvSpPr txBox="1"/>
           <p:nvPr/>
         </p:nvSpPr>
@@ -5986,11 +6039,18 @@
           </a:p>
           <a:p>
             <a:r>
+              <a:rPr lang="es-ES" sz="1400" b="1">
+                <a:latin typeface="Arial" pitchFamily="34" charset="0"/>
+                <a:cs typeface="Arial" pitchFamily="34" charset="0"/>
+              </a:rPr>
+              <a:t>ESPECIALIZACIÓN</a:t>
+            </a:r>
+            <a:r>
               <a:rPr lang="es-ES" sz="1400" b="1" dirty="0">
                 <a:latin typeface="Arial" pitchFamily="34" charset="0"/>
                 <a:cs typeface="Arial" pitchFamily="34" charset="0"/>
               </a:rPr>
-              <a:t>PROGRAMA DE ESPECIALIZACIÓN: </a:t>
+              <a:t>: </a:t>
             </a:r>
             <a:r>
               <a:rPr lang="es-PE" sz="1400" dirty="0">
@@ -6049,21 +6109,21 @@
       </p:pic>
       <p:graphicFrame>
         <p:nvGraphicFramePr>
-          <p:cNvPr id="24" name="Tabla 23"/>
+          <p:cNvPr id="24" name="PH_TABLA"/>
           <p:cNvGraphicFramePr>
             <a:graphicFrameLocks noGrp="1"/>
           </p:cNvGraphicFramePr>
           <p:nvPr>
             <p:extLst>
               <p:ext uri="{D42A27DB-BD31-4B8C-83A1-F6EECF244321}">
-                <p14:modId xmlns:p14="http://schemas.microsoft.com/office/powerpoint/2010/main" val="1384812688"/>
+                <p14:modId xmlns:p14="http://schemas.microsoft.com/office/powerpoint/2010/main" val="3545901934"/>
               </p:ext>
             </p:extLst>
           </p:nvPr>
         </p:nvGraphicFramePr>
         <p:xfrm>
-          <a:off x="745017" y="3319125"/>
-          <a:ext cx="5367967" cy="4710006"/>
+          <a:off x="657000" y="3103973"/>
+          <a:ext cx="5544000" cy="4710006"/>
         </p:xfrm>
         <a:graphic>
           <a:graphicData uri="http://schemas.openxmlformats.org/drawingml/2006/table">
@@ -6072,21 +6132,21 @@
                 <a:tableStyleId>{D7AC3CCA-C797-4891-BE02-D94E43425B78}</a:tableStyleId>
               </a:tblPr>
               <a:tblGrid>
-                <a:gridCol w="1449715">
+                <a:gridCol w="1497254">
                   <a:extLst>
                     <a:ext uri="{9D8B030D-6E8A-4147-A177-3AD203B41FA5}">
                       <a16:colId xmlns:a16="http://schemas.microsoft.com/office/drawing/2014/main" val="1484549653"/>
                     </a:ext>
                   </a:extLst>
                 </a:gridCol>
-                <a:gridCol w="2678906">
+                <a:gridCol w="2766756">
                   <a:extLst>
                     <a:ext uri="{9D8B030D-6E8A-4147-A177-3AD203B41FA5}">
                       <a16:colId xmlns:a16="http://schemas.microsoft.com/office/drawing/2014/main" val="1352610699"/>
                     </a:ext>
                   </a:extLst>
                 </a:gridCol>
-                <a:gridCol w="1239346">
+                <a:gridCol w="1279990">
                   <a:extLst>
                     <a:ext uri="{9D8B030D-6E8A-4147-A177-3AD203B41FA5}">
                       <a16:colId xmlns:a16="http://schemas.microsoft.com/office/drawing/2014/main" val="3793606720"/>
@@ -6241,7 +6301,7 @@
                     <a:p>
                       <a:pPr algn="ctr"/>
                       <a:r>
-                        <a:rPr lang="es-ES" sz="1000" dirty="0"/>
+                        <a:rPr lang="es-ES" sz="900" dirty="0"/>
                         <a:t>{{MODULO_1}}</a:t>
                       </a:r>
                     </a:p>
@@ -6334,7 +6394,7 @@
                         <a:defRPr/>
                       </a:pPr>
                       <a:r>
-                        <a:rPr lang="es-ES" sz="1000" dirty="0"/>
+                        <a:rPr lang="es-ES" sz="900" dirty="0"/>
                         <a:t>{{MODULO_2}}</a:t>
                       </a:r>
                     </a:p>
@@ -6407,7 +6467,7 @@
                         <a:defRPr/>
                       </a:pPr>
                       <a:r>
-                        <a:rPr lang="es-ES" sz="1000" dirty="0"/>
+                        <a:rPr lang="es-ES" sz="900" dirty="0"/>
                         <a:t>{{MODULO_3}}</a:t>
                       </a:r>
                     </a:p>
@@ -6500,10 +6560,10 @@
                         <a:defRPr/>
                       </a:pPr>
                       <a:r>
-                        <a:rPr lang="es-ES" sz="1000" dirty="0"/>
+                        <a:rPr lang="es-ES" sz="900" dirty="0"/>
                         <a:t>{{MODULO_4}}</a:t>
                       </a:r>
-                      <a:endParaRPr lang="es-ES" sz="1000" b="0" i="0" kern="1200" dirty="0">
+                      <a:endParaRPr lang="es-ES" sz="900" b="0" i="0" kern="1200" dirty="0">
                         <a:solidFill>
                           <a:schemeClr val="dk1"/>
                         </a:solidFill>
@@ -6598,10 +6658,10 @@
                         <a:defRPr/>
                       </a:pPr>
                       <a:r>
-                        <a:rPr lang="es-ES" sz="1000" dirty="0"/>
+                        <a:rPr lang="es-ES" sz="900" dirty="0"/>
                         <a:t>{{MODULO_5}}</a:t>
                       </a:r>
-                      <a:endParaRPr lang="es-ES" sz="1000" b="0" i="0" kern="1200" dirty="0">
+                      <a:endParaRPr lang="es-ES" sz="900" b="0" i="0" kern="1200" dirty="0">
                         <a:solidFill>
                           <a:schemeClr val="dk1"/>
                         </a:solidFill>
@@ -6700,10 +6760,10 @@
                         <a:defRPr/>
                       </a:pPr>
                       <a:r>
-                        <a:rPr lang="es-ES" sz="1000" dirty="0"/>
+                        <a:rPr lang="es-ES" sz="900" dirty="0"/>
                         <a:t>{{MODULO_6}}</a:t>
                       </a:r>
-                      <a:endParaRPr lang="es-ES" sz="1000" b="0" i="0" kern="1200" dirty="0">
+                      <a:endParaRPr lang="es-ES" sz="900" b="0" i="0" kern="1200" dirty="0">
                         <a:solidFill>
                           <a:schemeClr val="dk1"/>
                         </a:solidFill>
@@ -6801,7 +6861,7 @@
                         <a:defRPr/>
                       </a:pPr>
                       <a:r>
-                        <a:rPr lang="es-ES" sz="1000" dirty="0"/>
+                        <a:rPr lang="es-ES" sz="900" dirty="0"/>
                         <a:t>{{MODULO_7}}</a:t>
                       </a:r>
                     </a:p>
@@ -6881,7 +6941,7 @@
                     <a:p>
                       <a:pPr algn="ctr"/>
                       <a:r>
-                        <a:rPr lang="es-ES" sz="1000" dirty="0"/>
+                        <a:rPr lang="es-ES" sz="900" dirty="0"/>
                         <a:t>{{MODULO_8}}</a:t>
                       </a:r>
                     </a:p>
@@ -7123,10 +7183,10 @@
       </p:graphicFrame>
       <p:sp>
         <p:nvSpPr>
-          <p:cNvPr id="3" name="CuadroTexto 1">
+          <p:cNvPr id="4" name="CuadroTexto 3">
             <a:extLst>
               <a:ext uri="{FF2B5EF4-FFF2-40B4-BE49-F238E27FC236}">
-                <a16:creationId xmlns:a16="http://schemas.microsoft.com/office/drawing/2014/main" id="{73FC219E-6E54-02C6-2D68-ED6FE3FBB5EC}"/>
+                <a16:creationId xmlns:a16="http://schemas.microsoft.com/office/drawing/2014/main" id="{BDB58BA5-2B9D-5317-D8F9-1237E22BD396}"/>
               </a:ext>
             </a:extLst>
           </p:cNvPr>
@@ -7135,7 +7195,7 @@
         </p:nvSpPr>
         <p:spPr>
           <a:xfrm>
-            <a:off x="2905904" y="8314295"/>
+            <a:off x="2165696" y="8339798"/>
             <a:ext cx="1397690" cy="369332"/>
           </a:xfrm>
           <a:prstGeom prst="rect">
@@ -7244,10 +7304,9 @@
           </a:lstStyle>
           <a:p>
             <a:r>
-              <a:rPr lang="es-PE"/>
+              <a:rPr lang="es-PE" dirty="0"/>
               <a:t>{{QR_CODE}}</a:t>
             </a:r>
-            <a:endParaRPr lang="es-PE" dirty="0"/>
           </a:p>
         </p:txBody>
       </p:sp>
